--- a/IA com ESOF - Slide 5 - Expondo LLMs via Endpoints REST.pptx
+++ b/IA com ESOF - Slide 5 - Expondo LLMs via Endpoints REST.pptx
@@ -22591,12 +22591,28 @@
               <a:buNone/>
             </a:pPr>
             <a:r>
+              <a:rPr lang="pt-BR" sz="1600" b="1" smtClean="0">
+                <a:solidFill>
+                  <a:schemeClr val="dk1"/>
+                </a:solidFill>
+              </a:rPr>
+              <a:t>Slide </a:t>
+            </a:r>
+            <a:r>
+              <a:rPr lang="pt-BR" sz="1600" b="1" smtClean="0">
+                <a:solidFill>
+                  <a:schemeClr val="dk1"/>
+                </a:solidFill>
+              </a:rPr>
+              <a:t>5 </a:t>
+            </a:r>
+            <a:r>
               <a:rPr lang="pt-BR" sz="1600" b="1" dirty="0" smtClean="0">
                 <a:solidFill>
                   <a:schemeClr val="dk1"/>
                 </a:solidFill>
               </a:rPr>
-              <a:t>Slide 6 – Expondo LLMs via Endpoints REST</a:t>
+              <a:t>– Expondo LLMs via Endpoints REST</a:t>
             </a:r>
             <a:endParaRPr sz="1600" b="1" i="0" u="none" strike="noStrike" cap="none" dirty="0">
               <a:solidFill>
